--- a/m1/diapositivos/sessao-04-m1-f04.pptx
+++ b/m1/diapositivos/sessao-04-m1-f04.pptx
@@ -2318,7 +2318,41 @@
                 <a:ea typeface="Arial" pitchFamily="34" charset="-122"/>
                 <a:cs typeface="Arial" pitchFamily="34" charset="-120"/>
               </a:rPr>
-              <a:t>A fronteira entre escárnio e maldizer é a da Arte de Trovar, «palavras cobertas» ou «descobertamente», e «Ai dona fea» fica mesmo em cima dela.</a:t>
+              <a:t>A fronteira entre escárnio e maldizer é a da </a:t>
+            </a:r>
+            <a:pPr indent="0" marL="0">
+              <a:lnSpc>
+                <a:spcPct val="105000"/>
+              </a:lnSpc>
+              <a:buNone/>
+            </a:pPr>
+            <a:r>
+              <a:rPr lang="en-US" sz="2200" i="1" dirty="0">
+                <a:solidFill>
+                  <a:srgbClr val="F2F0EA"/>
+                </a:solidFill>
+                <a:latin typeface="Arial" pitchFamily="34" charset="0"/>
+                <a:ea typeface="Arial" pitchFamily="34" charset="-122"/>
+                <a:cs typeface="Arial" pitchFamily="34" charset="-120"/>
+              </a:rPr>
+              <a:t>Arte de Trovar</a:t>
+            </a:r>
+            <a:pPr indent="0" marL="0">
+              <a:lnSpc>
+                <a:spcPct val="105000"/>
+              </a:lnSpc>
+              <a:buNone/>
+            </a:pPr>
+            <a:r>
+              <a:rPr lang="en-US" sz="2200" dirty="0">
+                <a:solidFill>
+                  <a:srgbClr val="F2F0EA"/>
+                </a:solidFill>
+                <a:latin typeface="Arial" pitchFamily="34" charset="0"/>
+                <a:ea typeface="Arial" pitchFamily="34" charset="-122"/>
+                <a:cs typeface="Arial" pitchFamily="34" charset="-120"/>
+              </a:rPr>
+              <a:t>, «palavras cobertas» ou «descobertamente», e «Ai dona fea» fica mesmo em cima dela.</a:t>
             </a:r>
             <a:endParaRPr lang="en-US" sz="2200" dirty="0"/>
           </a:p>
@@ -5973,7 +6007,41 @@
                 <a:ea typeface="Arial" pitchFamily="34" charset="-122"/>
                 <a:cs typeface="Arial" pitchFamily="34" charset="-120"/>
               </a:rPr>
-              <a:t>A cantiga de escárnio finge louvar para troçar, com palavras cobertas e duplo sentido; a de maldizer diz mal abertamente, como explica a Arte de Trovar.</a:t>
+              <a:t>A cantiga de escárnio finge louvar para troçar, com palavras cobertas e duplo sentido; a de maldizer diz mal abertamente, como explica a </a:t>
+            </a:r>
+            <a:pPr indent="0" marL="0">
+              <a:lnSpc>
+                <a:spcPct val="105000"/>
+              </a:lnSpc>
+              <a:buNone/>
+            </a:pPr>
+            <a:r>
+              <a:rPr lang="en-US" sz="2200" i="1" dirty="0">
+                <a:solidFill>
+                  <a:srgbClr val="F2F0EA"/>
+                </a:solidFill>
+                <a:latin typeface="Arial" pitchFamily="34" charset="0"/>
+                <a:ea typeface="Arial" pitchFamily="34" charset="-122"/>
+                <a:cs typeface="Arial" pitchFamily="34" charset="-120"/>
+              </a:rPr>
+              <a:t>Arte de Trovar</a:t>
+            </a:r>
+            <a:pPr indent="0" marL="0">
+              <a:lnSpc>
+                <a:spcPct val="105000"/>
+              </a:lnSpc>
+              <a:buNone/>
+            </a:pPr>
+            <a:r>
+              <a:rPr lang="en-US" sz="2200" dirty="0">
+                <a:solidFill>
+                  <a:srgbClr val="F2F0EA"/>
+                </a:solidFill>
+                <a:latin typeface="Arial" pitchFamily="34" charset="0"/>
+                <a:ea typeface="Arial" pitchFamily="34" charset="-122"/>
+                <a:cs typeface="Arial" pitchFamily="34" charset="-120"/>
+              </a:rPr>
+              <a:t>.</a:t>
             </a:r>
             <a:endParaRPr lang="en-US" sz="2200" dirty="0"/>
           </a:p>
